--- a/effect-tests/style-candidate-editable-samples/samples/style-sample-oriental-heritage.pptx
+++ b/effect-tests/style-candidate-editable-samples/samples/style-sample-oriental-heritage.pptx
@@ -975,8 +975,8 @@
         </p:nvSpPr>
         <p:spPr>
           <a:xfrm>
-            <a:off x="658368" y="749808"/>
-            <a:ext cx="5486400" cy="777240"/>
+            <a:off x="658368" y="694944"/>
+            <a:ext cx="5623560" cy="777240"/>
           </a:xfrm>
           <a:prstGeom prst="rect">
             <a:avLst/>
@@ -994,7 +994,7 @@
               <a:buNone/>
             </a:pPr>
             <a:r>
-              <a:rPr lang="en-US" sz="2600" b="1" dirty="0">
+              <a:rPr lang="en-US" sz="2500" b="1" dirty="0">
                 <a:solidFill>
                   <a:srgbClr val="B91C1C"/>
                 </a:solidFill>
@@ -1004,7 +1004,7 @@
               </a:rPr>
               <a:t>2026 AI 应用趋势调研</a:t>
             </a:r>
-            <a:endParaRPr lang="en-US" sz="2600" dirty="0"/>
+            <a:endParaRPr lang="en-US" sz="2500" dirty="0"/>
           </a:p>
         </p:txBody>
       </p:sp>
@@ -1016,7 +1016,7 @@
         </p:nvSpPr>
         <p:spPr>
           <a:xfrm>
-            <a:off x="694944" y="1536192"/>
+            <a:off x="694944" y="1463040"/>
             <a:ext cx="4114800" cy="228600"/>
           </a:xfrm>
           <a:prstGeom prst="rect">
@@ -1057,16 +1057,360 @@
         </p:nvSpPr>
         <p:spPr>
           <a:xfrm>
-            <a:off x="685800" y="2029968"/>
-            <a:ext cx="5074920" cy="1874520"/>
+            <a:off x="658368" y="1975104"/>
+            <a:ext cx="4892040" cy="1920240"/>
           </a:xfrm>
           <a:prstGeom prst="roundRect">
             <a:avLst>
-              <a:gd name="adj" fmla="val 3902"/>
+              <a:gd name="adj" fmla="val 3810"/>
             </a:avLst>
           </a:prstGeom>
           <a:solidFill>
-            <a:srgbClr val="FFFFFF"/>
+            <a:srgbClr val="F7EFE0">
+              <a:alpha val="92000"/>
+            </a:srgbClr>
+          </a:solidFill>
+          <a:ln w="12700">
+            <a:solidFill>
+              <a:srgbClr val="B91C1C">
+                <a:alpha val="62000"/>
+              </a:srgbClr>
+            </a:solidFill>
+            <a:prstDash val="solid"/>
+          </a:ln>
+        </p:spPr>
+      </p:sp>
+      <p:sp>
+        <p:nvSpPr>
+          <p:cNvPr id="8" name="Shape 5"/>
+          <p:cNvSpPr/>
+          <p:nvPr/>
+        </p:nvSpPr>
+        <p:spPr>
+          <a:xfrm>
+            <a:off x="896112" y="2249424"/>
+            <a:ext cx="475488" cy="0"/>
+          </a:xfrm>
+          <a:prstGeom prst="line">
+            <a:avLst/>
+          </a:prstGeom>
+          <a:noFill/>
+          <a:ln w="25400">
+            <a:solidFill>
+              <a:srgbClr val="B91C1C">
+                <a:alpha val="92000"/>
+              </a:srgbClr>
+            </a:solidFill>
+            <a:prstDash val="solid"/>
+          </a:ln>
+        </p:spPr>
+      </p:sp>
+      <p:sp>
+        <p:nvSpPr>
+          <p:cNvPr id="9" name="Text 6"/>
+          <p:cNvSpPr/>
+          <p:nvPr/>
+        </p:nvSpPr>
+        <p:spPr>
+          <a:xfrm>
+            <a:off x="932688" y="2395728"/>
+            <a:ext cx="1645920" cy="256032"/>
+          </a:xfrm>
+          <a:prstGeom prst="rect">
+            <a:avLst/>
+          </a:prstGeom>
+          <a:noFill/>
+          <a:ln/>
+        </p:spPr>
+        <p:txBody>
+          <a:bodyPr wrap="square" lIns="0" tIns="0" rIns="0" bIns="0" rtlCol="0" anchor="ctr">
+            <a:normAutofit/>
+          </a:bodyPr>
+          <a:lstStyle/>
+          <a:p>
+            <a:pPr algn="l" indent="0" marL="0">
+              <a:buNone/>
+            </a:pPr>
+            <a:r>
+              <a:rPr lang="en-US" sz="1400" b="1" dirty="0">
+                <a:solidFill>
+                  <a:srgbClr val="B91C1C"/>
+                </a:solidFill>
+                <a:latin typeface="PingFang SC" pitchFamily="34" charset="0"/>
+                <a:ea typeface="PingFang SC" pitchFamily="34" charset="-122"/>
+                <a:cs typeface="PingFang SC" pitchFamily="34" charset="-120"/>
+              </a:rPr>
+              <a:t>趋势脉络</a:t>
+            </a:r>
+            <a:endParaRPr lang="en-US" sz="1400" dirty="0"/>
+          </a:p>
+        </p:txBody>
+      </p:sp>
+      <p:sp>
+        <p:nvSpPr>
+          <p:cNvPr id="10" name="Text 7"/>
+          <p:cNvSpPr/>
+          <p:nvPr/>
+        </p:nvSpPr>
+        <p:spPr>
+          <a:xfrm>
+            <a:off x="932688" y="2852928"/>
+            <a:ext cx="4160520" cy="512064"/>
+          </a:xfrm>
+          <a:prstGeom prst="rect">
+            <a:avLst/>
+          </a:prstGeom>
+          <a:noFill/>
+          <a:ln/>
+        </p:spPr>
+        <p:txBody>
+          <a:bodyPr wrap="square" lIns="0" tIns="0" rIns="0" bIns="0" rtlCol="0" anchor="ctr">
+            <a:normAutofit/>
+          </a:bodyPr>
+          <a:lstStyle/>
+          <a:p>
+            <a:pPr algn="l" indent="0" marL="0">
+              <a:buNone/>
+            </a:pPr>
+            <a:r>
+              <a:rPr lang="en-US" sz="1100" dirty="0">
+                <a:solidFill>
+                  <a:srgbClr val="5D6673"/>
+                </a:solidFill>
+                <a:latin typeface="PingFang SC" pitchFamily="34" charset="0"/>
+                <a:ea typeface="PingFang SC" pitchFamily="34" charset="-122"/>
+                <a:cs typeface="PingFang SC" pitchFamily="34" charset="-120"/>
+              </a:rPr>
+              <a:t>新技术落地不是一阵风，而是从器、术、法到组织文化的一次长期演进。</a:t>
+            </a:r>
+            <a:endParaRPr lang="en-US" sz="1100" dirty="0"/>
+          </a:p>
+        </p:txBody>
+      </p:sp>
+      <p:sp>
+        <p:nvSpPr>
+          <p:cNvPr id="11" name="Shape 8"/>
+          <p:cNvSpPr/>
+          <p:nvPr/>
+        </p:nvSpPr>
+        <p:spPr>
+          <a:xfrm>
+            <a:off x="950976" y="3529584"/>
+            <a:ext cx="73152" cy="73152"/>
+          </a:xfrm>
+          <a:prstGeom prst="ellipse">
+            <a:avLst/>
+          </a:prstGeom>
+          <a:solidFill>
+            <a:srgbClr val="B91C1C"/>
+          </a:solidFill>
+          <a:ln w="12700">
+            <a:solidFill>
+              <a:srgbClr val="333333">
+                <a:alpha val="0"/>
+              </a:srgbClr>
+            </a:solidFill>
+            <a:prstDash val="solid"/>
+          </a:ln>
+        </p:spPr>
+      </p:sp>
+      <p:sp>
+        <p:nvSpPr>
+          <p:cNvPr id="12" name="Text 9"/>
+          <p:cNvSpPr/>
+          <p:nvPr/>
+        </p:nvSpPr>
+        <p:spPr>
+          <a:xfrm>
+            <a:off x="1115568" y="3474720"/>
+            <a:ext cx="3291840" cy="164592"/>
+          </a:xfrm>
+          <a:prstGeom prst="rect">
+            <a:avLst/>
+          </a:prstGeom>
+          <a:noFill/>
+          <a:ln/>
+        </p:spPr>
+        <p:txBody>
+          <a:bodyPr wrap="square" lIns="0" tIns="0" rIns="0" bIns="0" rtlCol="0" anchor="ctr">
+            <a:normAutofit/>
+          </a:bodyPr>
+          <a:lstStyle/>
+          <a:p>
+            <a:pPr algn="l" indent="0" marL="0">
+              <a:buNone/>
+            </a:pPr>
+            <a:r>
+              <a:rPr lang="en-US" sz="820" dirty="0">
+                <a:solidFill>
+                  <a:srgbClr val="B91C1C"/>
+                </a:solidFill>
+                <a:latin typeface="PingFang SC" pitchFamily="34" charset="0"/>
+                <a:ea typeface="PingFang SC" pitchFamily="34" charset="-122"/>
+                <a:cs typeface="PingFang SC" pitchFamily="34" charset="-120"/>
+              </a:rPr>
+              <a:t>以器入局</a:t>
+            </a:r>
+            <a:endParaRPr lang="en-US" sz="820" dirty="0"/>
+          </a:p>
+        </p:txBody>
+      </p:sp>
+      <p:sp>
+        <p:nvSpPr>
+          <p:cNvPr id="13" name="Shape 10"/>
+          <p:cNvSpPr/>
+          <p:nvPr/>
+        </p:nvSpPr>
+        <p:spPr>
+          <a:xfrm>
+            <a:off x="950976" y="3776472"/>
+            <a:ext cx="73152" cy="73152"/>
+          </a:xfrm>
+          <a:prstGeom prst="ellipse">
+            <a:avLst/>
+          </a:prstGeom>
+          <a:solidFill>
+            <a:srgbClr val="171717"/>
+          </a:solidFill>
+          <a:ln w="12700">
+            <a:solidFill>
+              <a:srgbClr val="333333">
+                <a:alpha val="0"/>
+              </a:srgbClr>
+            </a:solidFill>
+            <a:prstDash val="solid"/>
+          </a:ln>
+        </p:spPr>
+      </p:sp>
+      <p:sp>
+        <p:nvSpPr>
+          <p:cNvPr id="14" name="Text 11"/>
+          <p:cNvSpPr/>
+          <p:nvPr/>
+        </p:nvSpPr>
+        <p:spPr>
+          <a:xfrm>
+            <a:off x="1115568" y="3721608"/>
+            <a:ext cx="3291840" cy="164592"/>
+          </a:xfrm>
+          <a:prstGeom prst="rect">
+            <a:avLst/>
+          </a:prstGeom>
+          <a:noFill/>
+          <a:ln/>
+        </p:spPr>
+        <p:txBody>
+          <a:bodyPr wrap="square" lIns="0" tIns="0" rIns="0" bIns="0" rtlCol="0" anchor="ctr">
+            <a:normAutofit/>
+          </a:bodyPr>
+          <a:lstStyle/>
+          <a:p>
+            <a:pPr algn="l" indent="0" marL="0">
+              <a:buNone/>
+            </a:pPr>
+            <a:r>
+              <a:rPr lang="en-US" sz="820" dirty="0">
+                <a:solidFill>
+                  <a:srgbClr val="B91C1C"/>
+                </a:solidFill>
+                <a:latin typeface="PingFang SC" pitchFamily="34" charset="0"/>
+                <a:ea typeface="PingFang SC" pitchFamily="34" charset="-122"/>
+                <a:cs typeface="PingFang SC" pitchFamily="34" charset="-120"/>
+              </a:rPr>
+              <a:t>以术成事</a:t>
+            </a:r>
+            <a:endParaRPr lang="en-US" sz="820" dirty="0"/>
+          </a:p>
+        </p:txBody>
+      </p:sp>
+      <p:sp>
+        <p:nvSpPr>
+          <p:cNvPr id="15" name="Shape 12"/>
+          <p:cNvSpPr/>
+          <p:nvPr/>
+        </p:nvSpPr>
+        <p:spPr>
+          <a:xfrm>
+            <a:off x="950976" y="4023360"/>
+            <a:ext cx="73152" cy="73152"/>
+          </a:xfrm>
+          <a:prstGeom prst="ellipse">
+            <a:avLst/>
+          </a:prstGeom>
+          <a:solidFill>
+            <a:srgbClr val="B91C1C"/>
+          </a:solidFill>
+          <a:ln w="12700">
+            <a:solidFill>
+              <a:srgbClr val="333333">
+                <a:alpha val="0"/>
+              </a:srgbClr>
+            </a:solidFill>
+            <a:prstDash val="solid"/>
+          </a:ln>
+        </p:spPr>
+      </p:sp>
+      <p:sp>
+        <p:nvSpPr>
+          <p:cNvPr id="16" name="Text 13"/>
+          <p:cNvSpPr/>
+          <p:nvPr/>
+        </p:nvSpPr>
+        <p:spPr>
+          <a:xfrm>
+            <a:off x="1115568" y="3968496"/>
+            <a:ext cx="3291840" cy="164592"/>
+          </a:xfrm>
+          <a:prstGeom prst="rect">
+            <a:avLst/>
+          </a:prstGeom>
+          <a:noFill/>
+          <a:ln/>
+        </p:spPr>
+        <p:txBody>
+          <a:bodyPr wrap="square" lIns="0" tIns="0" rIns="0" bIns="0" rtlCol="0" anchor="ctr">
+            <a:normAutofit/>
+          </a:bodyPr>
+          <a:lstStyle/>
+          <a:p>
+            <a:pPr algn="l" indent="0" marL="0">
+              <a:buNone/>
+            </a:pPr>
+            <a:r>
+              <a:rPr lang="en-US" sz="820" dirty="0">
+                <a:solidFill>
+                  <a:srgbClr val="B91C1C"/>
+                </a:solidFill>
+                <a:latin typeface="PingFang SC" pitchFamily="34" charset="0"/>
+                <a:ea typeface="PingFang SC" pitchFamily="34" charset="-122"/>
+                <a:cs typeface="PingFang SC" pitchFamily="34" charset="-120"/>
+              </a:rPr>
+              <a:t>以法固化</a:t>
+            </a:r>
+            <a:endParaRPr lang="en-US" sz="820" dirty="0"/>
+          </a:p>
+        </p:txBody>
+      </p:sp>
+      <p:sp>
+        <p:nvSpPr>
+          <p:cNvPr id="17" name="Shape 14"/>
+          <p:cNvSpPr/>
+          <p:nvPr/>
+        </p:nvSpPr>
+        <p:spPr>
+          <a:xfrm>
+            <a:off x="713232" y="4736592"/>
+            <a:ext cx="1261872" cy="694944"/>
+          </a:xfrm>
+          <a:prstGeom prst="roundRect">
+            <a:avLst>
+              <a:gd name="adj" fmla="val 10526"/>
+            </a:avLst>
+          </a:prstGeom>
+          <a:solidFill>
+            <a:srgbClr val="F3EADB">
+              <a:alpha val="86000"/>
+            </a:srgbClr>
           </a:solidFill>
           <a:ln w="12700">
             <a:solidFill>
@@ -1080,14 +1424,14 @@
       </p:sp>
       <p:sp>
         <p:nvSpPr>
-          <p:cNvPr id="8" name="Text 5"/>
-          <p:cNvSpPr/>
-          <p:nvPr/>
-        </p:nvSpPr>
-        <p:spPr>
-          <a:xfrm>
-            <a:off x="932688" y="2267712"/>
-            <a:ext cx="1645920" cy="256032"/>
+          <p:cNvPr id="18" name="Text 15"/>
+          <p:cNvSpPr/>
+          <p:nvPr/>
+        </p:nvSpPr>
+        <p:spPr>
+          <a:xfrm>
+            <a:off x="841248" y="4828032"/>
+            <a:ext cx="1005840" cy="319674"/>
           </a:xfrm>
           <a:prstGeom prst="rect">
             <a:avLst/>
@@ -1105,322 +1449,7 @@
               <a:buNone/>
             </a:pPr>
             <a:r>
-              <a:rPr lang="en-US" sz="1300" b="1" dirty="0">
-                <a:solidFill>
-                  <a:srgbClr val="B91C1C"/>
-                </a:solidFill>
-                <a:latin typeface="PingFang SC" pitchFamily="34" charset="0"/>
-                <a:ea typeface="PingFang SC" pitchFamily="34" charset="-122"/>
-                <a:cs typeface="PingFang SC" pitchFamily="34" charset="-120"/>
-              </a:rPr>
-              <a:t>趋势脉络</a:t>
-            </a:r>
-            <a:endParaRPr lang="en-US" sz="1300" dirty="0"/>
-          </a:p>
-        </p:txBody>
-      </p:sp>
-      <p:sp>
-        <p:nvSpPr>
-          <p:cNvPr id="9" name="Text 6"/>
-          <p:cNvSpPr/>
-          <p:nvPr/>
-        </p:nvSpPr>
-        <p:spPr>
-          <a:xfrm>
-            <a:off x="932688" y="2670048"/>
-            <a:ext cx="4343400" cy="603504"/>
-          </a:xfrm>
-          <a:prstGeom prst="rect">
-            <a:avLst/>
-          </a:prstGeom>
-          <a:noFill/>
-          <a:ln/>
-        </p:spPr>
-        <p:txBody>
-          <a:bodyPr wrap="square" lIns="0" tIns="0" rIns="0" bIns="0" rtlCol="0" anchor="ctr">
-            <a:normAutofit/>
-          </a:bodyPr>
-          <a:lstStyle/>
-          <a:p>
-            <a:pPr algn="l" indent="0" marL="0">
-              <a:buNone/>
-            </a:pPr>
-            <a:r>
-              <a:rPr lang="en-US" sz="1120" dirty="0">
-                <a:solidFill>
-                  <a:srgbClr val="5D6673"/>
-                </a:solidFill>
-                <a:latin typeface="PingFang SC" pitchFamily="34" charset="0"/>
-                <a:ea typeface="PingFang SC" pitchFamily="34" charset="-122"/>
-                <a:cs typeface="PingFang SC" pitchFamily="34" charset="-120"/>
-              </a:rPr>
-              <a:t>新技术落地不是一阵风，而是从器、术、法到组织文化的一次长期演进。</a:t>
-            </a:r>
-            <a:endParaRPr lang="en-US" sz="1120" dirty="0"/>
-          </a:p>
-        </p:txBody>
-      </p:sp>
-      <p:sp>
-        <p:nvSpPr>
-          <p:cNvPr id="10" name="Shape 7"/>
-          <p:cNvSpPr/>
-          <p:nvPr/>
-        </p:nvSpPr>
-        <p:spPr>
-          <a:xfrm>
-            <a:off x="960120" y="3493008"/>
-            <a:ext cx="82296" cy="82296"/>
-          </a:xfrm>
-          <a:prstGeom prst="ellipse">
-            <a:avLst/>
-          </a:prstGeom>
-          <a:solidFill>
-            <a:srgbClr val="B91C1C"/>
-          </a:solidFill>
-          <a:ln w="12700">
-            <a:solidFill>
-              <a:srgbClr val="333333">
-                <a:alpha val="0"/>
-              </a:srgbClr>
-            </a:solidFill>
-            <a:prstDash val="solid"/>
-          </a:ln>
-        </p:spPr>
-      </p:sp>
-      <p:sp>
-        <p:nvSpPr>
-          <p:cNvPr id="11" name="Text 8"/>
-          <p:cNvSpPr/>
-          <p:nvPr/>
-        </p:nvSpPr>
-        <p:spPr>
-          <a:xfrm>
-            <a:off x="1115568" y="3456432"/>
-            <a:ext cx="3474720" cy="146304"/>
-          </a:xfrm>
-          <a:prstGeom prst="rect">
-            <a:avLst/>
-          </a:prstGeom>
-          <a:noFill/>
-          <a:ln/>
-        </p:spPr>
-        <p:txBody>
-          <a:bodyPr wrap="square" lIns="0" tIns="0" rIns="0" bIns="0" rtlCol="0" anchor="ctr">
-            <a:normAutofit/>
-          </a:bodyPr>
-          <a:lstStyle/>
-          <a:p>
-            <a:pPr algn="l" indent="0" marL="0">
-              <a:buNone/>
-            </a:pPr>
-            <a:r>
-              <a:rPr lang="en-US" sz="830" dirty="0">
-                <a:solidFill>
-                  <a:srgbClr val="B91C1C"/>
-                </a:solidFill>
-                <a:latin typeface="PingFang SC" pitchFamily="34" charset="0"/>
-                <a:ea typeface="PingFang SC" pitchFamily="34" charset="-122"/>
-                <a:cs typeface="PingFang SC" pitchFamily="34" charset="-120"/>
-              </a:rPr>
-              <a:t>以器入局</a:t>
-            </a:r>
-            <a:endParaRPr lang="en-US" sz="830" dirty="0"/>
-          </a:p>
-        </p:txBody>
-      </p:sp>
-      <p:sp>
-        <p:nvSpPr>
-          <p:cNvPr id="12" name="Shape 9"/>
-          <p:cNvSpPr/>
-          <p:nvPr/>
-        </p:nvSpPr>
-        <p:spPr>
-          <a:xfrm>
-            <a:off x="960120" y="3749040"/>
-            <a:ext cx="82296" cy="82296"/>
-          </a:xfrm>
-          <a:prstGeom prst="ellipse">
-            <a:avLst/>
-          </a:prstGeom>
-          <a:solidFill>
-            <a:srgbClr val="171717"/>
-          </a:solidFill>
-          <a:ln w="12700">
-            <a:solidFill>
-              <a:srgbClr val="333333">
-                <a:alpha val="0"/>
-              </a:srgbClr>
-            </a:solidFill>
-            <a:prstDash val="solid"/>
-          </a:ln>
-        </p:spPr>
-      </p:sp>
-      <p:sp>
-        <p:nvSpPr>
-          <p:cNvPr id="13" name="Text 10"/>
-          <p:cNvSpPr/>
-          <p:nvPr/>
-        </p:nvSpPr>
-        <p:spPr>
-          <a:xfrm>
-            <a:off x="1115568" y="3712464"/>
-            <a:ext cx="3474720" cy="146304"/>
-          </a:xfrm>
-          <a:prstGeom prst="rect">
-            <a:avLst/>
-          </a:prstGeom>
-          <a:noFill/>
-          <a:ln/>
-        </p:spPr>
-        <p:txBody>
-          <a:bodyPr wrap="square" lIns="0" tIns="0" rIns="0" bIns="0" rtlCol="0" anchor="ctr">
-            <a:normAutofit/>
-          </a:bodyPr>
-          <a:lstStyle/>
-          <a:p>
-            <a:pPr algn="l" indent="0" marL="0">
-              <a:buNone/>
-            </a:pPr>
-            <a:r>
-              <a:rPr lang="en-US" sz="830" dirty="0">
-                <a:solidFill>
-                  <a:srgbClr val="B91C1C"/>
-                </a:solidFill>
-                <a:latin typeface="PingFang SC" pitchFamily="34" charset="0"/>
-                <a:ea typeface="PingFang SC" pitchFamily="34" charset="-122"/>
-                <a:cs typeface="PingFang SC" pitchFamily="34" charset="-120"/>
-              </a:rPr>
-              <a:t>以术成事</a:t>
-            </a:r>
-            <a:endParaRPr lang="en-US" sz="830" dirty="0"/>
-          </a:p>
-        </p:txBody>
-      </p:sp>
-      <p:sp>
-        <p:nvSpPr>
-          <p:cNvPr id="14" name="Shape 11"/>
-          <p:cNvSpPr/>
-          <p:nvPr/>
-        </p:nvSpPr>
-        <p:spPr>
-          <a:xfrm>
-            <a:off x="960120" y="4005072"/>
-            <a:ext cx="82296" cy="82296"/>
-          </a:xfrm>
-          <a:prstGeom prst="ellipse">
-            <a:avLst/>
-          </a:prstGeom>
-          <a:solidFill>
-            <a:srgbClr val="B91C1C"/>
-          </a:solidFill>
-          <a:ln w="12700">
-            <a:solidFill>
-              <a:srgbClr val="333333">
-                <a:alpha val="0"/>
-              </a:srgbClr>
-            </a:solidFill>
-            <a:prstDash val="solid"/>
-          </a:ln>
-        </p:spPr>
-      </p:sp>
-      <p:sp>
-        <p:nvSpPr>
-          <p:cNvPr id="15" name="Text 12"/>
-          <p:cNvSpPr/>
-          <p:nvPr/>
-        </p:nvSpPr>
-        <p:spPr>
-          <a:xfrm>
-            <a:off x="1115568" y="3968496"/>
-            <a:ext cx="3474720" cy="146304"/>
-          </a:xfrm>
-          <a:prstGeom prst="rect">
-            <a:avLst/>
-          </a:prstGeom>
-          <a:noFill/>
-          <a:ln/>
-        </p:spPr>
-        <p:txBody>
-          <a:bodyPr wrap="square" lIns="0" tIns="0" rIns="0" bIns="0" rtlCol="0" anchor="ctr">
-            <a:normAutofit/>
-          </a:bodyPr>
-          <a:lstStyle/>
-          <a:p>
-            <a:pPr algn="l" indent="0" marL="0">
-              <a:buNone/>
-            </a:pPr>
-            <a:r>
-              <a:rPr lang="en-US" sz="830" dirty="0">
-                <a:solidFill>
-                  <a:srgbClr val="B91C1C"/>
-                </a:solidFill>
-                <a:latin typeface="PingFang SC" pitchFamily="34" charset="0"/>
-                <a:ea typeface="PingFang SC" pitchFamily="34" charset="-122"/>
-                <a:cs typeface="PingFang SC" pitchFamily="34" charset="-120"/>
-              </a:rPr>
-              <a:t>以法固化</a:t>
-            </a:r>
-            <a:endParaRPr lang="en-US" sz="830" dirty="0"/>
-          </a:p>
-        </p:txBody>
-      </p:sp>
-      <p:sp>
-        <p:nvSpPr>
-          <p:cNvPr id="16" name="Shape 13"/>
-          <p:cNvSpPr/>
-          <p:nvPr/>
-        </p:nvSpPr>
-        <p:spPr>
-          <a:xfrm>
-            <a:off x="713232" y="4315968"/>
-            <a:ext cx="1417320" cy="841248"/>
-          </a:xfrm>
-          <a:prstGeom prst="roundRect">
-            <a:avLst>
-              <a:gd name="adj" fmla="val 8696"/>
-            </a:avLst>
-          </a:prstGeom>
-          <a:solidFill>
-            <a:srgbClr val="FFFFFF"/>
-          </a:solidFill>
-          <a:ln w="12700">
-            <a:solidFill>
-              <a:srgbClr val="B91C1C">
-                <a:alpha val="90000"/>
-              </a:srgbClr>
-            </a:solidFill>
-            <a:prstDash val="solid"/>
-          </a:ln>
-        </p:spPr>
-      </p:sp>
-      <p:sp>
-        <p:nvSpPr>
-          <p:cNvPr id="17" name="Text 14"/>
-          <p:cNvSpPr/>
-          <p:nvPr/>
-        </p:nvSpPr>
-        <p:spPr>
-          <a:xfrm>
-            <a:off x="877824" y="4480560"/>
-            <a:ext cx="1088136" cy="292608"/>
-          </a:xfrm>
-          <a:prstGeom prst="rect">
-            <a:avLst/>
-          </a:prstGeom>
-          <a:noFill/>
-          <a:ln/>
-        </p:spPr>
-        <p:txBody>
-          <a:bodyPr wrap="square" lIns="0" tIns="0" rIns="0" bIns="0" rtlCol="0" anchor="ctr">
-            <a:normAutofit/>
-          </a:bodyPr>
-          <a:lstStyle/>
-          <a:p>
-            <a:pPr algn="l" indent="0" marL="0">
-              <a:buNone/>
-            </a:pPr>
-            <a:r>
-              <a:rPr lang="en-US" sz="2100" b="1" dirty="0">
+              <a:rPr lang="en-US" sz="1700" b="1" dirty="0">
                 <a:solidFill>
                   <a:srgbClr val="B91C1C"/>
                 </a:solidFill>
@@ -1430,20 +1459,20 @@
               </a:rPr>
               <a:t>73%</a:t>
             </a:r>
-            <a:endParaRPr lang="en-US" sz="2100" dirty="0"/>
-          </a:p>
-        </p:txBody>
-      </p:sp>
-      <p:sp>
-        <p:nvSpPr>
-          <p:cNvPr id="18" name="Text 15"/>
-          <p:cNvSpPr/>
-          <p:nvPr/>
-        </p:nvSpPr>
-        <p:spPr>
-          <a:xfrm>
-            <a:off x="877824" y="4828032"/>
-            <a:ext cx="1088136" cy="256032"/>
+            <a:endParaRPr lang="en-US" sz="1700" dirty="0"/>
+          </a:p>
+        </p:txBody>
+      </p:sp>
+      <p:sp>
+        <p:nvSpPr>
+          <p:cNvPr id="19" name="Text 16"/>
+          <p:cNvSpPr/>
+          <p:nvPr/>
+        </p:nvSpPr>
+        <p:spPr>
+          <a:xfrm>
+            <a:off x="841248" y="5139660"/>
+            <a:ext cx="1005840" cy="180685"/>
           </a:xfrm>
           <a:prstGeom prst="rect">
             <a:avLst/>
@@ -1461,7 +1490,7 @@
               <a:buNone/>
             </a:pPr>
             <a:r>
-              <a:rPr lang="en-US" sz="950" b="1" dirty="0">
+              <a:rPr lang="en-US" sz="760" b="1" dirty="0">
                 <a:solidFill>
                   <a:srgbClr val="B91C1C"/>
                 </a:solidFill>
@@ -1471,33 +1500,35 @@
               </a:rPr>
               <a:t>企业已进入试点</a:t>
             </a:r>
-            <a:endParaRPr lang="en-US" sz="950" dirty="0"/>
-          </a:p>
-        </p:txBody>
-      </p:sp>
-      <p:sp>
-        <p:nvSpPr>
-          <p:cNvPr id="19" name="Shape 16"/>
-          <p:cNvSpPr/>
-          <p:nvPr/>
-        </p:nvSpPr>
-        <p:spPr>
-          <a:xfrm>
-            <a:off x="2395728" y="4315968"/>
-            <a:ext cx="1417320" cy="841248"/>
+            <a:endParaRPr lang="en-US" sz="760" dirty="0"/>
+          </a:p>
+        </p:txBody>
+      </p:sp>
+      <p:sp>
+        <p:nvSpPr>
+          <p:cNvPr id="20" name="Shape 17"/>
+          <p:cNvSpPr/>
+          <p:nvPr/>
+        </p:nvSpPr>
+        <p:spPr>
+          <a:xfrm>
+            <a:off x="2377440" y="4736592"/>
+            <a:ext cx="1261872" cy="694944"/>
           </a:xfrm>
           <a:prstGeom prst="roundRect">
             <a:avLst>
-              <a:gd name="adj" fmla="val 8696"/>
+              <a:gd name="adj" fmla="val 10526"/>
             </a:avLst>
           </a:prstGeom>
           <a:solidFill>
-            <a:srgbClr val="FFFFFF"/>
+            <a:srgbClr val="FAF8F2">
+              <a:alpha val="86000"/>
+            </a:srgbClr>
           </a:solidFill>
           <a:ln w="12700">
             <a:solidFill>
               <a:srgbClr val="171717">
-                <a:alpha val="90000"/>
+                <a:alpha val="70000"/>
               </a:srgbClr>
             </a:solidFill>
             <a:prstDash val="solid"/>
@@ -1506,14 +1537,14 @@
       </p:sp>
       <p:sp>
         <p:nvSpPr>
-          <p:cNvPr id="20" name="Text 17"/>
-          <p:cNvSpPr/>
-          <p:nvPr/>
-        </p:nvSpPr>
-        <p:spPr>
-          <a:xfrm>
-            <a:off x="2560320" y="4480560"/>
-            <a:ext cx="1088136" cy="292608"/>
+          <p:cNvPr id="21" name="Text 18"/>
+          <p:cNvSpPr/>
+          <p:nvPr/>
+        </p:nvSpPr>
+        <p:spPr>
+          <a:xfrm>
+            <a:off x="2505456" y="4828032"/>
+            <a:ext cx="1005840" cy="319674"/>
           </a:xfrm>
           <a:prstGeom prst="rect">
             <a:avLst/>
@@ -1531,7 +1562,7 @@
               <a:buNone/>
             </a:pPr>
             <a:r>
-              <a:rPr lang="en-US" sz="2100" b="1" dirty="0">
+              <a:rPr lang="en-US" sz="1700" b="1" dirty="0">
                 <a:solidFill>
                   <a:srgbClr val="171717"/>
                 </a:solidFill>
@@ -1541,20 +1572,20 @@
               </a:rPr>
               <a:t>3x</a:t>
             </a:r>
-            <a:endParaRPr lang="en-US" sz="2100" dirty="0"/>
-          </a:p>
-        </p:txBody>
-      </p:sp>
-      <p:sp>
-        <p:nvSpPr>
-          <p:cNvPr id="21" name="Text 18"/>
-          <p:cNvSpPr/>
-          <p:nvPr/>
-        </p:nvSpPr>
-        <p:spPr>
-          <a:xfrm>
-            <a:off x="2560320" y="4828032"/>
-            <a:ext cx="1088136" cy="256032"/>
+            <a:endParaRPr lang="en-US" sz="1700" dirty="0"/>
+          </a:p>
+        </p:txBody>
+      </p:sp>
+      <p:sp>
+        <p:nvSpPr>
+          <p:cNvPr id="22" name="Text 19"/>
+          <p:cNvSpPr/>
+          <p:nvPr/>
+        </p:nvSpPr>
+        <p:spPr>
+          <a:xfrm>
+            <a:off x="2505456" y="5139660"/>
+            <a:ext cx="1005840" cy="180685"/>
           </a:xfrm>
           <a:prstGeom prst="rect">
             <a:avLst/>
@@ -1572,7 +1603,7 @@
               <a:buNone/>
             </a:pPr>
             <a:r>
-              <a:rPr lang="en-US" sz="950" b="1" dirty="0">
+              <a:rPr lang="en-US" sz="760" b="1" dirty="0">
                 <a:solidFill>
                   <a:srgbClr val="B91C1C"/>
                 </a:solidFill>
@@ -1582,33 +1613,35 @@
               </a:rPr>
               <a:t>高频任务提效</a:t>
             </a:r>
-            <a:endParaRPr lang="en-US" sz="950" dirty="0"/>
-          </a:p>
-        </p:txBody>
-      </p:sp>
-      <p:sp>
-        <p:nvSpPr>
-          <p:cNvPr id="22" name="Shape 19"/>
-          <p:cNvSpPr/>
-          <p:nvPr/>
-        </p:nvSpPr>
-        <p:spPr>
-          <a:xfrm>
-            <a:off x="4078224" y="4315968"/>
-            <a:ext cx="1417320" cy="841248"/>
+            <a:endParaRPr lang="en-US" sz="760" dirty="0"/>
+          </a:p>
+        </p:txBody>
+      </p:sp>
+      <p:sp>
+        <p:nvSpPr>
+          <p:cNvPr id="23" name="Shape 20"/>
+          <p:cNvSpPr/>
+          <p:nvPr/>
+        </p:nvSpPr>
+        <p:spPr>
+          <a:xfrm>
+            <a:off x="4041648" y="4736592"/>
+            <a:ext cx="1261872" cy="694944"/>
           </a:xfrm>
           <a:prstGeom prst="roundRect">
             <a:avLst>
-              <a:gd name="adj" fmla="val 8696"/>
+              <a:gd name="adj" fmla="val 10526"/>
             </a:avLst>
           </a:prstGeom>
           <a:solidFill>
-            <a:srgbClr val="FFFFFF"/>
+            <a:srgbClr val="F3EADB">
+              <a:alpha val="86000"/>
+            </a:srgbClr>
           </a:solidFill>
           <a:ln w="12700">
             <a:solidFill>
               <a:srgbClr val="B91C1C">
-                <a:alpha val="90000"/>
+                <a:alpha val="70000"/>
               </a:srgbClr>
             </a:solidFill>
             <a:prstDash val="solid"/>
@@ -1617,14 +1650,14 @@
       </p:sp>
       <p:sp>
         <p:nvSpPr>
-          <p:cNvPr id="23" name="Text 20"/>
-          <p:cNvSpPr/>
-          <p:nvPr/>
-        </p:nvSpPr>
-        <p:spPr>
-          <a:xfrm>
-            <a:off x="4242816" y="4480560"/>
-            <a:ext cx="1088136" cy="292608"/>
+          <p:cNvPr id="24" name="Text 21"/>
+          <p:cNvSpPr/>
+          <p:nvPr/>
+        </p:nvSpPr>
+        <p:spPr>
+          <a:xfrm>
+            <a:off x="4169664" y="4828032"/>
+            <a:ext cx="1005840" cy="319674"/>
           </a:xfrm>
           <a:prstGeom prst="rect">
             <a:avLst/>
@@ -1642,7 +1675,7 @@
               <a:buNone/>
             </a:pPr>
             <a:r>
-              <a:rPr lang="en-US" sz="2100" b="1" dirty="0">
+              <a:rPr lang="en-US" sz="1700" b="1" dirty="0">
                 <a:solidFill>
                   <a:srgbClr val="B91C1C"/>
                 </a:solidFill>
@@ -1652,20 +1685,20 @@
               </a:rPr>
               <a:t>2026</a:t>
             </a:r>
-            <a:endParaRPr lang="en-US" sz="2100" dirty="0"/>
-          </a:p>
-        </p:txBody>
-      </p:sp>
-      <p:sp>
-        <p:nvSpPr>
-          <p:cNvPr id="24" name="Text 21"/>
-          <p:cNvSpPr/>
-          <p:nvPr/>
-        </p:nvSpPr>
-        <p:spPr>
-          <a:xfrm>
-            <a:off x="4242816" y="4828032"/>
-            <a:ext cx="1088136" cy="256032"/>
+            <a:endParaRPr lang="en-US" sz="1700" dirty="0"/>
+          </a:p>
+        </p:txBody>
+      </p:sp>
+      <p:sp>
+        <p:nvSpPr>
+          <p:cNvPr id="25" name="Text 22"/>
+          <p:cNvSpPr/>
+          <p:nvPr/>
+        </p:nvSpPr>
+        <p:spPr>
+          <a:xfrm>
+            <a:off x="4169664" y="5139660"/>
+            <a:ext cx="1005840" cy="180685"/>
           </a:xfrm>
           <a:prstGeom prst="rect">
             <a:avLst/>
@@ -1683,7 +1716,7 @@
               <a:buNone/>
             </a:pPr>
             <a:r>
-              <a:rPr lang="en-US" sz="950" b="1" dirty="0">
+              <a:rPr lang="en-US" sz="760" b="1" dirty="0">
                 <a:solidFill>
                   <a:srgbClr val="B91C1C"/>
                 </a:solidFill>
@@ -1693,38 +1726,9 @@
               </a:rPr>
               <a:t>规模化落地窗口</a:t>
             </a:r>
-            <a:endParaRPr lang="en-US" sz="950" dirty="0"/>
-          </a:p>
-        </p:txBody>
-      </p:sp>
-      <p:sp>
-        <p:nvSpPr>
-          <p:cNvPr id="25" name="Shape 22"/>
-          <p:cNvSpPr/>
-          <p:nvPr/>
-        </p:nvSpPr>
-        <p:spPr>
-          <a:xfrm>
-            <a:off x="6720840" y="1051560"/>
-            <a:ext cx="4389120" cy="4251960"/>
-          </a:xfrm>
-          <a:prstGeom prst="roundRect">
-            <a:avLst>
-              <a:gd name="adj" fmla="val 1720"/>
-            </a:avLst>
-          </a:prstGeom>
-          <a:solidFill>
-            <a:srgbClr val="FFFFFF"/>
-          </a:solidFill>
-          <a:ln w="12700">
-            <a:solidFill>
-              <a:srgbClr val="171717">
-                <a:alpha val="66000"/>
-              </a:srgbClr>
-            </a:solidFill>
-            <a:prstDash val="solid"/>
-          </a:ln>
-        </p:spPr>
+            <a:endParaRPr lang="en-US" sz="760" dirty="0"/>
+          </a:p>
+        </p:txBody>
       </p:sp>
       <p:sp>
         <p:nvSpPr>
@@ -1734,8 +1738,8 @@
         </p:nvSpPr>
         <p:spPr>
           <a:xfrm>
-            <a:off x="7059168" y="1335024"/>
-            <a:ext cx="2011680" cy="237744"/>
+            <a:off x="6876288" y="1417320"/>
+            <a:ext cx="1920240" cy="237744"/>
           </a:xfrm>
           <a:prstGeom prst="rect">
             <a:avLst/>
@@ -1753,7 +1757,7 @@
               <a:buNone/>
             </a:pPr>
             <a:r>
-              <a:rPr lang="en-US" sz="1300" b="1" dirty="0">
+              <a:rPr lang="en-US" sz="1400" b="1" dirty="0">
                 <a:solidFill>
                   <a:srgbClr val="B91C1C"/>
                 </a:solidFill>
@@ -1763,7 +1767,7 @@
               </a:rPr>
               <a:t>趋势指数</a:t>
             </a:r>
-            <a:endParaRPr lang="en-US" sz="1300" dirty="0"/>
+            <a:endParaRPr lang="en-US" sz="1400" dirty="0"/>
           </a:p>
         </p:txBody>
       </p:sp>
@@ -1775,8 +1779,58 @@
         </p:nvSpPr>
         <p:spPr>
           <a:xfrm>
-            <a:off x="7260336" y="3055193"/>
-            <a:ext cx="628650" cy="821863"/>
+            <a:off x="6839712" y="1810512"/>
+            <a:ext cx="3767328" cy="0"/>
+          </a:xfrm>
+          <a:prstGeom prst="line">
+            <a:avLst/>
+          </a:prstGeom>
+          <a:noFill/>
+          <a:ln w="15240">
+            <a:solidFill>
+              <a:srgbClr val="B91C1C">
+                <a:alpha val="65000"/>
+              </a:srgbClr>
+            </a:solidFill>
+            <a:prstDash val="solid"/>
+          </a:ln>
+        </p:spPr>
+      </p:sp>
+      <p:sp>
+        <p:nvSpPr>
+          <p:cNvPr id="28" name="Shape 25"/>
+          <p:cNvSpPr/>
+          <p:nvPr/>
+        </p:nvSpPr>
+        <p:spPr>
+          <a:xfrm>
+            <a:off x="6720840" y="3931920"/>
+            <a:ext cx="3767328" cy="0"/>
+          </a:xfrm>
+          <a:prstGeom prst="line">
+            <a:avLst/>
+          </a:prstGeom>
+          <a:noFill/>
+          <a:ln w="12700">
+            <a:solidFill>
+              <a:srgbClr val="A7A7A7">
+                <a:alpha val="70000"/>
+              </a:srgbClr>
+            </a:solidFill>
+            <a:prstDash val="solid"/>
+          </a:ln>
+        </p:spPr>
+      </p:sp>
+      <p:sp>
+        <p:nvSpPr>
+          <p:cNvPr id="29" name="Shape 26"/>
+          <p:cNvSpPr/>
+          <p:nvPr/>
+        </p:nvSpPr>
+        <p:spPr>
+          <a:xfrm>
+            <a:off x="6922008" y="3117738"/>
+            <a:ext cx="690372" cy="814182"/>
           </a:xfrm>
           <a:prstGeom prst="rect">
             <a:avLst/>
@@ -1796,14 +1850,14 @@
       </p:sp>
       <p:sp>
         <p:nvSpPr>
-          <p:cNvPr id="28" name="Text 25"/>
-          <p:cNvSpPr/>
-          <p:nvPr/>
-        </p:nvSpPr>
-        <p:spPr>
-          <a:xfrm>
-            <a:off x="7223760" y="4005072"/>
-            <a:ext cx="701802" cy="164592"/>
+          <p:cNvPr id="30" name="Text 27"/>
+          <p:cNvSpPr/>
+          <p:nvPr/>
+        </p:nvSpPr>
+        <p:spPr>
+          <a:xfrm>
+            <a:off x="6885432" y="4059936"/>
+            <a:ext cx="763524" cy="164592"/>
           </a:xfrm>
           <a:prstGeom prst="rect">
             <a:avLst/>
@@ -1837,14 +1891,14 @@
       </p:sp>
       <p:sp>
         <p:nvSpPr>
-          <p:cNvPr id="29" name="Shape 26"/>
-          <p:cNvSpPr/>
-          <p:nvPr/>
-        </p:nvSpPr>
-        <p:spPr>
-          <a:xfrm>
-            <a:off x="8090154" y="2624694"/>
-            <a:ext cx="628650" cy="1252362"/>
+          <p:cNvPr id="31" name="Shape 28"/>
+          <p:cNvSpPr/>
+          <p:nvPr/>
+        </p:nvSpPr>
+        <p:spPr>
+          <a:xfrm>
+            <a:off x="7813548" y="2691262"/>
+            <a:ext cx="690372" cy="1240658"/>
           </a:xfrm>
           <a:prstGeom prst="rect">
             <a:avLst/>
@@ -1864,14 +1918,14 @@
       </p:sp>
       <p:sp>
         <p:nvSpPr>
-          <p:cNvPr id="30" name="Text 27"/>
-          <p:cNvSpPr/>
-          <p:nvPr/>
-        </p:nvSpPr>
-        <p:spPr>
-          <a:xfrm>
-            <a:off x="8053578" y="4005072"/>
-            <a:ext cx="701802" cy="164592"/>
+          <p:cNvPr id="32" name="Text 29"/>
+          <p:cNvSpPr/>
+          <p:nvPr/>
+        </p:nvSpPr>
+        <p:spPr>
+          <a:xfrm>
+            <a:off x="7776972" y="4059936"/>
+            <a:ext cx="763524" cy="164592"/>
           </a:xfrm>
           <a:prstGeom prst="rect">
             <a:avLst/>
@@ -1905,14 +1959,14 @@
       </p:sp>
       <p:sp>
         <p:nvSpPr>
-          <p:cNvPr id="31" name="Shape 28"/>
-          <p:cNvSpPr/>
-          <p:nvPr/>
-        </p:nvSpPr>
-        <p:spPr>
-          <a:xfrm>
-            <a:off x="8919972" y="2350740"/>
-            <a:ext cx="628650" cy="1526316"/>
+          <p:cNvPr id="33" name="Shape 30"/>
+          <p:cNvSpPr/>
+          <p:nvPr/>
+        </p:nvSpPr>
+        <p:spPr>
+          <a:xfrm>
+            <a:off x="8705088" y="2419868"/>
+            <a:ext cx="690372" cy="1512052"/>
           </a:xfrm>
           <a:prstGeom prst="rect">
             <a:avLst/>
@@ -1932,14 +1986,14 @@
       </p:sp>
       <p:sp>
         <p:nvSpPr>
-          <p:cNvPr id="32" name="Text 29"/>
-          <p:cNvSpPr/>
-          <p:nvPr/>
-        </p:nvSpPr>
-        <p:spPr>
-          <a:xfrm>
-            <a:off x="8883396" y="4005072"/>
-            <a:ext cx="701802" cy="164592"/>
+          <p:cNvPr id="34" name="Text 31"/>
+          <p:cNvSpPr/>
+          <p:nvPr/>
+        </p:nvSpPr>
+        <p:spPr>
+          <a:xfrm>
+            <a:off x="8668512" y="4059936"/>
+            <a:ext cx="763524" cy="164592"/>
           </a:xfrm>
           <a:prstGeom prst="rect">
             <a:avLst/>
@@ -1973,14 +2027,14 @@
       </p:sp>
       <p:sp>
         <p:nvSpPr>
-          <p:cNvPr id="33" name="Shape 30"/>
-          <p:cNvSpPr/>
-          <p:nvPr/>
-        </p:nvSpPr>
-        <p:spPr>
-          <a:xfrm>
-            <a:off x="9749790" y="2096353"/>
-            <a:ext cx="628650" cy="1780703"/>
+          <p:cNvPr id="35" name="Shape 32"/>
+          <p:cNvSpPr/>
+          <p:nvPr/>
+        </p:nvSpPr>
+        <p:spPr>
+          <a:xfrm>
+            <a:off x="9596628" y="2167860"/>
+            <a:ext cx="690372" cy="1764060"/>
           </a:xfrm>
           <a:prstGeom prst="rect">
             <a:avLst/>
@@ -2000,14 +2054,14 @@
       </p:sp>
       <p:sp>
         <p:nvSpPr>
-          <p:cNvPr id="34" name="Text 31"/>
-          <p:cNvSpPr/>
-          <p:nvPr/>
-        </p:nvSpPr>
-        <p:spPr>
-          <a:xfrm>
-            <a:off x="9713214" y="4005072"/>
-            <a:ext cx="701802" cy="164592"/>
+          <p:cNvPr id="36" name="Text 33"/>
+          <p:cNvSpPr/>
+          <p:nvPr/>
+        </p:nvSpPr>
+        <p:spPr>
+          <a:xfrm>
+            <a:off x="9560052" y="4059936"/>
+            <a:ext cx="763524" cy="164592"/>
           </a:xfrm>
           <a:prstGeom prst="rect">
             <a:avLst/>
@@ -2041,14 +2095,39 @@
       </p:sp>
       <p:sp>
         <p:nvSpPr>
-          <p:cNvPr id="35" name="Text 32"/>
-          <p:cNvSpPr/>
-          <p:nvPr/>
-        </p:nvSpPr>
-        <p:spPr>
-          <a:xfrm>
-            <a:off x="7059168" y="4681728"/>
-            <a:ext cx="3520440" cy="256032"/>
+          <p:cNvPr id="37" name="Shape 34"/>
+          <p:cNvSpPr/>
+          <p:nvPr/>
+        </p:nvSpPr>
+        <p:spPr>
+          <a:xfrm>
+            <a:off x="6858000" y="4846320"/>
+            <a:ext cx="475488" cy="0"/>
+          </a:xfrm>
+          <a:prstGeom prst="line">
+            <a:avLst/>
+          </a:prstGeom>
+          <a:noFill/>
+          <a:ln w="19050">
+            <a:solidFill>
+              <a:srgbClr val="B91C1C">
+                <a:alpha val="90000"/>
+              </a:srgbClr>
+            </a:solidFill>
+            <a:prstDash val="solid"/>
+          </a:ln>
+        </p:spPr>
+      </p:sp>
+      <p:sp>
+        <p:nvSpPr>
+          <p:cNvPr id="38" name="Text 35"/>
+          <p:cNvSpPr/>
+          <p:nvPr/>
+        </p:nvSpPr>
+        <p:spPr>
+          <a:xfrm>
+            <a:off x="7479792" y="4754880"/>
+            <a:ext cx="3474720" cy="164592"/>
           </a:xfrm>
           <a:prstGeom prst="rect">
             <a:avLst/>
@@ -2066,7 +2145,7 @@
               <a:buNone/>
             </a:pPr>
             <a:r>
-              <a:rPr lang="en-US" sz="840" dirty="0">
+              <a:rPr lang="en-US" sz="740" dirty="0">
                 <a:solidFill>
                   <a:srgbClr val="5D6673"/>
                 </a:solidFill>
@@ -2074,15 +2153,15 @@
                 <a:ea typeface="PingFang SC" pitchFamily="34" charset="-122"/>
                 <a:cs typeface="PingFang SC" pitchFamily="34" charset="-120"/>
               </a:rPr>
-              <a:t>样张中的文字、数字和图表标签均为 PPT 可编辑对象</a:t>
-            </a:r>
-            <a:endParaRPr lang="en-US" sz="840" dirty="0"/>
-          </a:p>
-        </p:txBody>
-      </p:sp>
-      <p:sp>
-        <p:nvSpPr>
-          <p:cNvPr id="36" name="Text 33"/>
+              <a:t>文字、数字和图表标签均为 PPT 可编辑对象</a:t>
+            </a:r>
+            <a:endParaRPr lang="en-US" sz="740" dirty="0"/>
+          </a:p>
+        </p:txBody>
+      </p:sp>
+      <p:sp>
+        <p:nvSpPr>
+          <p:cNvPr id="39" name="Text 36"/>
           <p:cNvSpPr/>
           <p:nvPr/>
         </p:nvSpPr>
@@ -2107,7 +2186,7 @@
               <a:buNone/>
             </a:pPr>
             <a:r>
-              <a:rPr lang="en-US" sz="750" b="1" dirty="0">
+              <a:rPr lang="en-US" sz="720" b="1" dirty="0">
                 <a:solidFill>
                   <a:srgbClr val="B91C1C"/>
                 </a:solidFill>
@@ -2117,7 +2196,7 @@
               </a:rPr>
               <a:t>国潮东方</a:t>
             </a:r>
-            <a:endParaRPr lang="en-US" sz="750" dirty="0"/>
+            <a:endParaRPr lang="en-US" sz="720" dirty="0"/>
           </a:p>
         </p:txBody>
       </p:sp>

--- a/effect-tests/style-candidate-editable-samples/samples/style-sample-oriental-heritage.pptx
+++ b/effect-tests/style-candidate-editable-samples/samples/style-sample-oriental-heritage.pptx
@@ -1016,8 +1016,8 @@
         </p:nvSpPr>
         <p:spPr>
           <a:xfrm>
-            <a:off x="694944" y="1463040"/>
-            <a:ext cx="4114800" cy="228600"/>
+            <a:off x="2395728" y="1463040"/>
+            <a:ext cx="3063240" cy="228600"/>
           </a:xfrm>
           <a:prstGeom prst="rect">
             <a:avLst/>
@@ -1057,23 +1057,17 @@
         </p:nvSpPr>
         <p:spPr>
           <a:xfrm>
-            <a:off x="658368" y="1975104"/>
-            <a:ext cx="4892040" cy="1920240"/>
-          </a:xfrm>
-          <a:prstGeom prst="roundRect">
-            <a:avLst>
-              <a:gd name="adj" fmla="val 3810"/>
-            </a:avLst>
-          </a:prstGeom>
-          <a:solidFill>
-            <a:srgbClr val="F7EFE0">
-              <a:alpha val="92000"/>
-            </a:srgbClr>
-          </a:solidFill>
-          <a:ln w="12700">
+            <a:off x="2907792" y="1938528"/>
+            <a:ext cx="512064" cy="0"/>
+          </a:xfrm>
+          <a:prstGeom prst="line">
+            <a:avLst/>
+          </a:prstGeom>
+          <a:noFill/>
+          <a:ln w="25400">
             <a:solidFill>
               <a:srgbClr val="B91C1C">
-                <a:alpha val="62000"/>
+                <a:alpha val="65000"/>
               </a:srgbClr>
             </a:solidFill>
             <a:prstDash val="solid"/>
@@ -1082,38 +1076,13 @@
       </p:sp>
       <p:sp>
         <p:nvSpPr>
-          <p:cNvPr id="8" name="Shape 5"/>
-          <p:cNvSpPr/>
-          <p:nvPr/>
-        </p:nvSpPr>
-        <p:spPr>
-          <a:xfrm>
-            <a:off x="896112" y="2249424"/>
-            <a:ext cx="475488" cy="0"/>
-          </a:xfrm>
-          <a:prstGeom prst="line">
-            <a:avLst/>
-          </a:prstGeom>
-          <a:noFill/>
-          <a:ln w="25400">
-            <a:solidFill>
-              <a:srgbClr val="B91C1C">
-                <a:alpha val="92000"/>
-              </a:srgbClr>
-            </a:solidFill>
-            <a:prstDash val="solid"/>
-          </a:ln>
-        </p:spPr>
-      </p:sp>
-      <p:sp>
-        <p:nvSpPr>
-          <p:cNvPr id="9" name="Text 6"/>
-          <p:cNvSpPr/>
-          <p:nvPr/>
-        </p:nvSpPr>
-        <p:spPr>
-          <a:xfrm>
-            <a:off x="932688" y="2395728"/>
+          <p:cNvPr id="8" name="Text 5"/>
+          <p:cNvSpPr/>
+          <p:nvPr/>
+        </p:nvSpPr>
+        <p:spPr>
+          <a:xfrm>
+            <a:off x="2907792" y="2121408"/>
             <a:ext cx="1645920" cy="256032"/>
           </a:xfrm>
           <a:prstGeom prst="rect">
@@ -1132,7 +1101,7 @@
               <a:buNone/>
             </a:pPr>
             <a:r>
-              <a:rPr lang="en-US" sz="1400" b="1" dirty="0">
+              <a:rPr lang="en-US" sz="1300" b="1" dirty="0">
                 <a:solidFill>
                   <a:srgbClr val="B91C1C"/>
                 </a:solidFill>
@@ -1142,20 +1111,20 @@
               </a:rPr>
               <a:t>趋势脉络</a:t>
             </a:r>
-            <a:endParaRPr lang="en-US" sz="1400" dirty="0"/>
-          </a:p>
-        </p:txBody>
-      </p:sp>
-      <p:sp>
-        <p:nvSpPr>
-          <p:cNvPr id="10" name="Text 7"/>
-          <p:cNvSpPr/>
-          <p:nvPr/>
-        </p:nvSpPr>
-        <p:spPr>
-          <a:xfrm>
-            <a:off x="932688" y="2852928"/>
-            <a:ext cx="4160520" cy="512064"/>
+            <a:endParaRPr lang="en-US" sz="1300" dirty="0"/>
+          </a:p>
+        </p:txBody>
+      </p:sp>
+      <p:sp>
+        <p:nvSpPr>
+          <p:cNvPr id="9" name="Text 6"/>
+          <p:cNvSpPr/>
+          <p:nvPr/>
+        </p:nvSpPr>
+        <p:spPr>
+          <a:xfrm>
+            <a:off x="2907792" y="2624328"/>
+            <a:ext cx="3337560" cy="603504"/>
           </a:xfrm>
           <a:prstGeom prst="rect">
             <a:avLst/>
@@ -1173,7 +1142,7 @@
               <a:buNone/>
             </a:pPr>
             <a:r>
-              <a:rPr lang="en-US" sz="1100" dirty="0">
+              <a:rPr lang="en-US" sz="1120" dirty="0">
                 <a:solidFill>
                   <a:srgbClr val="5D6673"/>
                 </a:solidFill>
@@ -1183,19 +1152,19 @@
               </a:rPr>
               <a:t>新技术落地不是一阵风，而是从器、术、法到组织文化的一次长期演进。</a:t>
             </a:r>
-            <a:endParaRPr lang="en-US" sz="1100" dirty="0"/>
-          </a:p>
-        </p:txBody>
-      </p:sp>
-      <p:sp>
-        <p:nvSpPr>
-          <p:cNvPr id="11" name="Shape 8"/>
-          <p:cNvSpPr/>
-          <p:nvPr/>
-        </p:nvSpPr>
-        <p:spPr>
-          <a:xfrm>
-            <a:off x="950976" y="3529584"/>
+            <a:endParaRPr lang="en-US" sz="1120" dirty="0"/>
+          </a:p>
+        </p:txBody>
+      </p:sp>
+      <p:sp>
+        <p:nvSpPr>
+          <p:cNvPr id="10" name="Shape 7"/>
+          <p:cNvSpPr/>
+          <p:nvPr/>
+        </p:nvSpPr>
+        <p:spPr>
+          <a:xfrm>
+            <a:off x="2926080" y="3438144"/>
             <a:ext cx="73152" cy="73152"/>
           </a:xfrm>
           <a:prstGeom prst="ellipse">
@@ -1216,14 +1185,14 @@
       </p:sp>
       <p:sp>
         <p:nvSpPr>
-          <p:cNvPr id="12" name="Text 9"/>
-          <p:cNvSpPr/>
-          <p:nvPr/>
-        </p:nvSpPr>
-        <p:spPr>
-          <a:xfrm>
-            <a:off x="1115568" y="3474720"/>
-            <a:ext cx="3291840" cy="164592"/>
+          <p:cNvPr id="11" name="Text 8"/>
+          <p:cNvSpPr/>
+          <p:nvPr/>
+        </p:nvSpPr>
+        <p:spPr>
+          <a:xfrm>
+            <a:off x="3090672" y="3383280"/>
+            <a:ext cx="2926080" cy="164592"/>
           </a:xfrm>
           <a:prstGeom prst="rect">
             <a:avLst/>
@@ -1241,7 +1210,7 @@
               <a:buNone/>
             </a:pPr>
             <a:r>
-              <a:rPr lang="en-US" sz="820" dirty="0">
+              <a:rPr lang="en-US" sz="830" dirty="0">
                 <a:solidFill>
                   <a:srgbClr val="B91C1C"/>
                 </a:solidFill>
@@ -1251,19 +1220,19 @@
               </a:rPr>
               <a:t>以器入局</a:t>
             </a:r>
-            <a:endParaRPr lang="en-US" sz="820" dirty="0"/>
-          </a:p>
-        </p:txBody>
-      </p:sp>
-      <p:sp>
-        <p:nvSpPr>
-          <p:cNvPr id="13" name="Shape 10"/>
-          <p:cNvSpPr/>
-          <p:nvPr/>
-        </p:nvSpPr>
-        <p:spPr>
-          <a:xfrm>
-            <a:off x="950976" y="3776472"/>
+            <a:endParaRPr lang="en-US" sz="830" dirty="0"/>
+          </a:p>
+        </p:txBody>
+      </p:sp>
+      <p:sp>
+        <p:nvSpPr>
+          <p:cNvPr id="12" name="Shape 9"/>
+          <p:cNvSpPr/>
+          <p:nvPr/>
+        </p:nvSpPr>
+        <p:spPr>
+          <a:xfrm>
+            <a:off x="2926080" y="3730752"/>
             <a:ext cx="73152" cy="73152"/>
           </a:xfrm>
           <a:prstGeom prst="ellipse">
@@ -1284,14 +1253,14 @@
       </p:sp>
       <p:sp>
         <p:nvSpPr>
-          <p:cNvPr id="14" name="Text 11"/>
-          <p:cNvSpPr/>
-          <p:nvPr/>
-        </p:nvSpPr>
-        <p:spPr>
-          <a:xfrm>
-            <a:off x="1115568" y="3721608"/>
-            <a:ext cx="3291840" cy="164592"/>
+          <p:cNvPr id="13" name="Text 10"/>
+          <p:cNvSpPr/>
+          <p:nvPr/>
+        </p:nvSpPr>
+        <p:spPr>
+          <a:xfrm>
+            <a:off x="3090672" y="3675888"/>
+            <a:ext cx="2926080" cy="164592"/>
           </a:xfrm>
           <a:prstGeom prst="rect">
             <a:avLst/>
@@ -1309,7 +1278,7 @@
               <a:buNone/>
             </a:pPr>
             <a:r>
-              <a:rPr lang="en-US" sz="820" dirty="0">
+              <a:rPr lang="en-US" sz="830" dirty="0">
                 <a:solidFill>
                   <a:srgbClr val="B91C1C"/>
                 </a:solidFill>
@@ -1319,19 +1288,19 @@
               </a:rPr>
               <a:t>以术成事</a:t>
             </a:r>
-            <a:endParaRPr lang="en-US" sz="820" dirty="0"/>
-          </a:p>
-        </p:txBody>
-      </p:sp>
-      <p:sp>
-        <p:nvSpPr>
-          <p:cNvPr id="15" name="Shape 12"/>
-          <p:cNvSpPr/>
-          <p:nvPr/>
-        </p:nvSpPr>
-        <p:spPr>
-          <a:xfrm>
-            <a:off x="950976" y="4023360"/>
+            <a:endParaRPr lang="en-US" sz="830" dirty="0"/>
+          </a:p>
+        </p:txBody>
+      </p:sp>
+      <p:sp>
+        <p:nvSpPr>
+          <p:cNvPr id="14" name="Shape 11"/>
+          <p:cNvSpPr/>
+          <p:nvPr/>
+        </p:nvSpPr>
+        <p:spPr>
+          <a:xfrm>
+            <a:off x="2926080" y="4023360"/>
             <a:ext cx="73152" cy="73152"/>
           </a:xfrm>
           <a:prstGeom prst="ellipse">
@@ -1352,14 +1321,14 @@
       </p:sp>
       <p:sp>
         <p:nvSpPr>
-          <p:cNvPr id="16" name="Text 13"/>
-          <p:cNvSpPr/>
-          <p:nvPr/>
-        </p:nvSpPr>
-        <p:spPr>
-          <a:xfrm>
-            <a:off x="1115568" y="3968496"/>
-            <a:ext cx="3291840" cy="164592"/>
+          <p:cNvPr id="15" name="Text 12"/>
+          <p:cNvSpPr/>
+          <p:nvPr/>
+        </p:nvSpPr>
+        <p:spPr>
+          <a:xfrm>
+            <a:off x="3090672" y="3968496"/>
+            <a:ext cx="2926080" cy="164592"/>
           </a:xfrm>
           <a:prstGeom prst="rect">
             <a:avLst/>
@@ -1377,7 +1346,7 @@
               <a:buNone/>
             </a:pPr>
             <a:r>
-              <a:rPr lang="en-US" sz="820" dirty="0">
+              <a:rPr lang="en-US" sz="830" dirty="0">
                 <a:solidFill>
                   <a:srgbClr val="B91C1C"/>
                 </a:solidFill>
@@ -1387,35 +1356,35 @@
               </a:rPr>
               <a:t>以法固化</a:t>
             </a:r>
-            <a:endParaRPr lang="en-US" sz="820" dirty="0"/>
-          </a:p>
-        </p:txBody>
-      </p:sp>
-      <p:sp>
-        <p:nvSpPr>
-          <p:cNvPr id="17" name="Shape 14"/>
-          <p:cNvSpPr/>
-          <p:nvPr/>
-        </p:nvSpPr>
-        <p:spPr>
-          <a:xfrm>
-            <a:off x="713232" y="4736592"/>
-            <a:ext cx="1261872" cy="694944"/>
+            <a:endParaRPr lang="en-US" sz="830" dirty="0"/>
+          </a:p>
+        </p:txBody>
+      </p:sp>
+      <p:sp>
+        <p:nvSpPr>
+          <p:cNvPr id="16" name="Shape 13"/>
+          <p:cNvSpPr/>
+          <p:nvPr/>
+        </p:nvSpPr>
+        <p:spPr>
+          <a:xfrm>
+            <a:off x="2139696" y="4645152"/>
+            <a:ext cx="1353312" cy="621792"/>
           </a:xfrm>
           <a:prstGeom prst="roundRect">
             <a:avLst>
-              <a:gd name="adj" fmla="val 10526"/>
+              <a:gd name="adj" fmla="val 11765"/>
             </a:avLst>
           </a:prstGeom>
           <a:solidFill>
             <a:srgbClr val="F3EADB">
-              <a:alpha val="86000"/>
+              <a:alpha val="76000"/>
             </a:srgbClr>
           </a:solidFill>
           <a:ln w="12700">
             <a:solidFill>
               <a:srgbClr val="B91C1C">
-                <a:alpha val="70000"/>
+                <a:alpha val="64000"/>
               </a:srgbClr>
             </a:solidFill>
             <a:prstDash val="solid"/>
@@ -1424,14 +1393,14 @@
       </p:sp>
       <p:sp>
         <p:nvSpPr>
-          <p:cNvPr id="18" name="Text 15"/>
-          <p:cNvSpPr/>
-          <p:nvPr/>
-        </p:nvSpPr>
-        <p:spPr>
-          <a:xfrm>
-            <a:off x="841248" y="4828032"/>
-            <a:ext cx="1005840" cy="319674"/>
+          <p:cNvPr id="17" name="Text 14"/>
+          <p:cNvSpPr/>
+          <p:nvPr/>
+        </p:nvSpPr>
+        <p:spPr>
+          <a:xfrm>
+            <a:off x="2267712" y="4736592"/>
+            <a:ext cx="1097280" cy="286024"/>
           </a:xfrm>
           <a:prstGeom prst="rect">
             <a:avLst/>
@@ -1449,7 +1418,7 @@
               <a:buNone/>
             </a:pPr>
             <a:r>
-              <a:rPr lang="en-US" sz="1700" b="1" dirty="0">
+              <a:rPr lang="en-US" sz="1800" b="1" dirty="0">
                 <a:solidFill>
                   <a:srgbClr val="B91C1C"/>
                 </a:solidFill>
@@ -1459,20 +1428,20 @@
               </a:rPr>
               <a:t>73%</a:t>
             </a:r>
-            <a:endParaRPr lang="en-US" sz="1700" dirty="0"/>
-          </a:p>
-        </p:txBody>
-      </p:sp>
-      <p:sp>
-        <p:nvSpPr>
-          <p:cNvPr id="19" name="Text 16"/>
-          <p:cNvSpPr/>
-          <p:nvPr/>
-        </p:nvSpPr>
-        <p:spPr>
-          <a:xfrm>
-            <a:off x="841248" y="5139660"/>
-            <a:ext cx="1005840" cy="180685"/>
+            <a:endParaRPr lang="en-US" sz="1800" dirty="0"/>
+          </a:p>
+        </p:txBody>
+      </p:sp>
+      <p:sp>
+        <p:nvSpPr>
+          <p:cNvPr id="18" name="Text 15"/>
+          <p:cNvSpPr/>
+          <p:nvPr/>
+        </p:nvSpPr>
+        <p:spPr>
+          <a:xfrm>
+            <a:off x="2267712" y="5005791"/>
+            <a:ext cx="1097280" cy="161666"/>
           </a:xfrm>
           <a:prstGeom prst="rect">
             <a:avLst/>
@@ -1506,29 +1475,29 @@
       </p:sp>
       <p:sp>
         <p:nvSpPr>
-          <p:cNvPr id="20" name="Shape 17"/>
-          <p:cNvSpPr/>
-          <p:nvPr/>
-        </p:nvSpPr>
-        <p:spPr>
-          <a:xfrm>
-            <a:off x="2377440" y="4736592"/>
-            <a:ext cx="1261872" cy="694944"/>
+          <p:cNvPr id="19" name="Shape 16"/>
+          <p:cNvSpPr/>
+          <p:nvPr/>
+        </p:nvSpPr>
+        <p:spPr>
+          <a:xfrm>
+            <a:off x="3822192" y="4645152"/>
+            <a:ext cx="1353312" cy="621792"/>
           </a:xfrm>
           <a:prstGeom prst="roundRect">
             <a:avLst>
-              <a:gd name="adj" fmla="val 10526"/>
+              <a:gd name="adj" fmla="val 11765"/>
             </a:avLst>
           </a:prstGeom>
           <a:solidFill>
             <a:srgbClr val="FAF8F2">
-              <a:alpha val="86000"/>
+              <a:alpha val="76000"/>
             </a:srgbClr>
           </a:solidFill>
           <a:ln w="12700">
             <a:solidFill>
               <a:srgbClr val="171717">
-                <a:alpha val="70000"/>
+                <a:alpha val="64000"/>
               </a:srgbClr>
             </a:solidFill>
             <a:prstDash val="solid"/>
@@ -1537,14 +1506,14 @@
       </p:sp>
       <p:sp>
         <p:nvSpPr>
-          <p:cNvPr id="21" name="Text 18"/>
-          <p:cNvSpPr/>
-          <p:nvPr/>
-        </p:nvSpPr>
-        <p:spPr>
-          <a:xfrm>
-            <a:off x="2505456" y="4828032"/>
-            <a:ext cx="1005840" cy="319674"/>
+          <p:cNvPr id="20" name="Text 17"/>
+          <p:cNvSpPr/>
+          <p:nvPr/>
+        </p:nvSpPr>
+        <p:spPr>
+          <a:xfrm>
+            <a:off x="3950208" y="4736592"/>
+            <a:ext cx="1097280" cy="286024"/>
           </a:xfrm>
           <a:prstGeom prst="rect">
             <a:avLst/>
@@ -1562,7 +1531,7 @@
               <a:buNone/>
             </a:pPr>
             <a:r>
-              <a:rPr lang="en-US" sz="1700" b="1" dirty="0">
+              <a:rPr lang="en-US" sz="1800" b="1" dirty="0">
                 <a:solidFill>
                   <a:srgbClr val="171717"/>
                 </a:solidFill>
@@ -1572,20 +1541,20 @@
               </a:rPr>
               <a:t>3x</a:t>
             </a:r>
-            <a:endParaRPr lang="en-US" sz="1700" dirty="0"/>
-          </a:p>
-        </p:txBody>
-      </p:sp>
-      <p:sp>
-        <p:nvSpPr>
-          <p:cNvPr id="22" name="Text 19"/>
-          <p:cNvSpPr/>
-          <p:nvPr/>
-        </p:nvSpPr>
-        <p:spPr>
-          <a:xfrm>
-            <a:off x="2505456" y="5139660"/>
-            <a:ext cx="1005840" cy="180685"/>
+            <a:endParaRPr lang="en-US" sz="1800" dirty="0"/>
+          </a:p>
+        </p:txBody>
+      </p:sp>
+      <p:sp>
+        <p:nvSpPr>
+          <p:cNvPr id="21" name="Text 18"/>
+          <p:cNvSpPr/>
+          <p:nvPr/>
+        </p:nvSpPr>
+        <p:spPr>
+          <a:xfrm>
+            <a:off x="3950208" y="5005791"/>
+            <a:ext cx="1097280" cy="161666"/>
           </a:xfrm>
           <a:prstGeom prst="rect">
             <a:avLst/>
@@ -1619,29 +1588,29 @@
       </p:sp>
       <p:sp>
         <p:nvSpPr>
-          <p:cNvPr id="23" name="Shape 20"/>
-          <p:cNvSpPr/>
-          <p:nvPr/>
-        </p:nvSpPr>
-        <p:spPr>
-          <a:xfrm>
-            <a:off x="4041648" y="4736592"/>
-            <a:ext cx="1261872" cy="694944"/>
+          <p:cNvPr id="22" name="Shape 19"/>
+          <p:cNvSpPr/>
+          <p:nvPr/>
+        </p:nvSpPr>
+        <p:spPr>
+          <a:xfrm>
+            <a:off x="5504688" y="4645152"/>
+            <a:ext cx="1353312" cy="621792"/>
           </a:xfrm>
           <a:prstGeom prst="roundRect">
             <a:avLst>
-              <a:gd name="adj" fmla="val 10526"/>
+              <a:gd name="adj" fmla="val 11765"/>
             </a:avLst>
           </a:prstGeom>
           <a:solidFill>
             <a:srgbClr val="F3EADB">
-              <a:alpha val="86000"/>
+              <a:alpha val="76000"/>
             </a:srgbClr>
           </a:solidFill>
           <a:ln w="12700">
             <a:solidFill>
               <a:srgbClr val="B91C1C">
-                <a:alpha val="70000"/>
+                <a:alpha val="64000"/>
               </a:srgbClr>
             </a:solidFill>
             <a:prstDash val="solid"/>
@@ -1650,14 +1619,14 @@
       </p:sp>
       <p:sp>
         <p:nvSpPr>
-          <p:cNvPr id="24" name="Text 21"/>
-          <p:cNvSpPr/>
-          <p:nvPr/>
-        </p:nvSpPr>
-        <p:spPr>
-          <a:xfrm>
-            <a:off x="4169664" y="4828032"/>
-            <a:ext cx="1005840" cy="319674"/>
+          <p:cNvPr id="23" name="Text 20"/>
+          <p:cNvSpPr/>
+          <p:nvPr/>
+        </p:nvSpPr>
+        <p:spPr>
+          <a:xfrm>
+            <a:off x="5632704" y="4736592"/>
+            <a:ext cx="1097280" cy="286024"/>
           </a:xfrm>
           <a:prstGeom prst="rect">
             <a:avLst/>
@@ -1675,7 +1644,7 @@
               <a:buNone/>
             </a:pPr>
             <a:r>
-              <a:rPr lang="en-US" sz="1700" b="1" dirty="0">
+              <a:rPr lang="en-US" sz="1800" b="1" dirty="0">
                 <a:solidFill>
                   <a:srgbClr val="B91C1C"/>
                 </a:solidFill>
@@ -1685,20 +1654,20 @@
               </a:rPr>
               <a:t>2026</a:t>
             </a:r>
-            <a:endParaRPr lang="en-US" sz="1700" dirty="0"/>
-          </a:p>
-        </p:txBody>
-      </p:sp>
-      <p:sp>
-        <p:nvSpPr>
-          <p:cNvPr id="25" name="Text 22"/>
-          <p:cNvSpPr/>
-          <p:nvPr/>
-        </p:nvSpPr>
-        <p:spPr>
-          <a:xfrm>
-            <a:off x="4169664" y="5139660"/>
-            <a:ext cx="1005840" cy="180685"/>
+            <a:endParaRPr lang="en-US" sz="1800" dirty="0"/>
+          </a:p>
+        </p:txBody>
+      </p:sp>
+      <p:sp>
+        <p:nvSpPr>
+          <p:cNvPr id="24" name="Text 21"/>
+          <p:cNvSpPr/>
+          <p:nvPr/>
+        </p:nvSpPr>
+        <p:spPr>
+          <a:xfrm>
+            <a:off x="5632704" y="5005791"/>
+            <a:ext cx="1097280" cy="161666"/>
           </a:xfrm>
           <a:prstGeom prst="rect">
             <a:avLst/>
@@ -1732,14 +1701,14 @@
       </p:sp>
       <p:sp>
         <p:nvSpPr>
-          <p:cNvPr id="26" name="Text 23"/>
-          <p:cNvSpPr/>
-          <p:nvPr/>
-        </p:nvSpPr>
-        <p:spPr>
-          <a:xfrm>
-            <a:off x="6876288" y="1417320"/>
-            <a:ext cx="1920240" cy="237744"/>
+          <p:cNvPr id="25" name="Text 22"/>
+          <p:cNvSpPr/>
+          <p:nvPr/>
+        </p:nvSpPr>
+        <p:spPr>
+          <a:xfrm>
+            <a:off x="6903720" y="1335024"/>
+            <a:ext cx="2011680" cy="237744"/>
           </a:xfrm>
           <a:prstGeom prst="rect">
             <a:avLst/>
@@ -1757,7 +1726,7 @@
               <a:buNone/>
             </a:pPr>
             <a:r>
-              <a:rPr lang="en-US" sz="1400" b="1" dirty="0">
+              <a:rPr lang="en-US" sz="1300" b="1" dirty="0">
                 <a:solidFill>
                   <a:srgbClr val="B91C1C"/>
                 </a:solidFill>
@@ -1767,20 +1736,20 @@
               </a:rPr>
               <a:t>趋势指数</a:t>
             </a:r>
-            <a:endParaRPr lang="en-US" sz="1400" dirty="0"/>
-          </a:p>
-        </p:txBody>
-      </p:sp>
-      <p:sp>
-        <p:nvSpPr>
-          <p:cNvPr id="27" name="Shape 24"/>
-          <p:cNvSpPr/>
-          <p:nvPr/>
-        </p:nvSpPr>
-        <p:spPr>
-          <a:xfrm>
-            <a:off x="6839712" y="1810512"/>
-            <a:ext cx="3767328" cy="0"/>
+            <a:endParaRPr lang="en-US" sz="1300" dirty="0"/>
+          </a:p>
+        </p:txBody>
+      </p:sp>
+      <p:sp>
+        <p:nvSpPr>
+          <p:cNvPr id="26" name="Shape 23"/>
+          <p:cNvSpPr/>
+          <p:nvPr/>
+        </p:nvSpPr>
+        <p:spPr>
+          <a:xfrm>
+            <a:off x="6903720" y="1719072"/>
+            <a:ext cx="3730752" cy="0"/>
           </a:xfrm>
           <a:prstGeom prst="line">
             <a:avLst/>
@@ -1798,14 +1767,14 @@
       </p:sp>
       <p:sp>
         <p:nvSpPr>
-          <p:cNvPr id="28" name="Shape 25"/>
-          <p:cNvSpPr/>
-          <p:nvPr/>
-        </p:nvSpPr>
-        <p:spPr>
-          <a:xfrm>
-            <a:off x="6720840" y="3931920"/>
-            <a:ext cx="3767328" cy="0"/>
+          <p:cNvPr id="27" name="Shape 24"/>
+          <p:cNvSpPr/>
+          <p:nvPr/>
+        </p:nvSpPr>
+        <p:spPr>
+          <a:xfrm>
+            <a:off x="6830568" y="4151376"/>
+            <a:ext cx="3730752" cy="0"/>
           </a:xfrm>
           <a:prstGeom prst="line">
             <a:avLst/>
@@ -1823,14 +1792,14 @@
       </p:sp>
       <p:sp>
         <p:nvSpPr>
-          <p:cNvPr id="29" name="Shape 26"/>
-          <p:cNvSpPr/>
-          <p:nvPr/>
-        </p:nvSpPr>
-        <p:spPr>
-          <a:xfrm>
-            <a:off x="6922008" y="3117738"/>
-            <a:ext cx="690372" cy="814182"/>
+          <p:cNvPr id="28" name="Shape 25"/>
+          <p:cNvSpPr/>
+          <p:nvPr/>
+        </p:nvSpPr>
+        <p:spPr>
+          <a:xfrm>
+            <a:off x="7031736" y="3283428"/>
+            <a:ext cx="681228" cy="867948"/>
           </a:xfrm>
           <a:prstGeom prst="rect">
             <a:avLst/>
@@ -1850,14 +1819,14 @@
       </p:sp>
       <p:sp>
         <p:nvSpPr>
-          <p:cNvPr id="30" name="Text 27"/>
-          <p:cNvSpPr/>
-          <p:nvPr/>
-        </p:nvSpPr>
-        <p:spPr>
-          <a:xfrm>
-            <a:off x="6885432" y="4059936"/>
-            <a:ext cx="763524" cy="164592"/>
+          <p:cNvPr id="29" name="Text 26"/>
+          <p:cNvSpPr/>
+          <p:nvPr/>
+        </p:nvSpPr>
+        <p:spPr>
+          <a:xfrm>
+            <a:off x="6995160" y="4279392"/>
+            <a:ext cx="754380" cy="164592"/>
           </a:xfrm>
           <a:prstGeom prst="rect">
             <a:avLst/>
@@ -1891,14 +1860,14 @@
       </p:sp>
       <p:sp>
         <p:nvSpPr>
-          <p:cNvPr id="31" name="Shape 28"/>
-          <p:cNvSpPr/>
-          <p:nvPr/>
-        </p:nvSpPr>
-        <p:spPr>
-          <a:xfrm>
-            <a:off x="7813548" y="2691262"/>
-            <a:ext cx="690372" cy="1240658"/>
+          <p:cNvPr id="30" name="Shape 27"/>
+          <p:cNvSpPr/>
+          <p:nvPr/>
+        </p:nvSpPr>
+        <p:spPr>
+          <a:xfrm>
+            <a:off x="7914132" y="2828788"/>
+            <a:ext cx="681228" cy="1322588"/>
           </a:xfrm>
           <a:prstGeom prst="rect">
             <a:avLst/>
@@ -1918,14 +1887,14 @@
       </p:sp>
       <p:sp>
         <p:nvSpPr>
-          <p:cNvPr id="32" name="Text 29"/>
-          <p:cNvSpPr/>
-          <p:nvPr/>
-        </p:nvSpPr>
-        <p:spPr>
-          <a:xfrm>
-            <a:off x="7776972" y="4059936"/>
-            <a:ext cx="763524" cy="164592"/>
+          <p:cNvPr id="31" name="Text 28"/>
+          <p:cNvSpPr/>
+          <p:nvPr/>
+        </p:nvSpPr>
+        <p:spPr>
+          <a:xfrm>
+            <a:off x="7877556" y="4279392"/>
+            <a:ext cx="754380" cy="164592"/>
           </a:xfrm>
           <a:prstGeom prst="rect">
             <a:avLst/>
@@ -1959,14 +1928,14 @@
       </p:sp>
       <p:sp>
         <p:nvSpPr>
-          <p:cNvPr id="33" name="Shape 30"/>
-          <p:cNvSpPr/>
-          <p:nvPr/>
-        </p:nvSpPr>
-        <p:spPr>
-          <a:xfrm>
-            <a:off x="8705088" y="2419868"/>
-            <a:ext cx="690372" cy="1512052"/>
+          <p:cNvPr id="32" name="Shape 29"/>
+          <p:cNvSpPr/>
+          <p:nvPr/>
+        </p:nvSpPr>
+        <p:spPr>
+          <a:xfrm>
+            <a:off x="8796528" y="2539472"/>
+            <a:ext cx="681228" cy="1611904"/>
           </a:xfrm>
           <a:prstGeom prst="rect">
             <a:avLst/>
@@ -1986,14 +1955,14 @@
       </p:sp>
       <p:sp>
         <p:nvSpPr>
-          <p:cNvPr id="34" name="Text 31"/>
-          <p:cNvSpPr/>
-          <p:nvPr/>
-        </p:nvSpPr>
-        <p:spPr>
-          <a:xfrm>
-            <a:off x="8668512" y="4059936"/>
-            <a:ext cx="763524" cy="164592"/>
+          <p:cNvPr id="33" name="Text 30"/>
+          <p:cNvSpPr/>
+          <p:nvPr/>
+        </p:nvSpPr>
+        <p:spPr>
+          <a:xfrm>
+            <a:off x="8759952" y="4279392"/>
+            <a:ext cx="754380" cy="164592"/>
           </a:xfrm>
           <a:prstGeom prst="rect">
             <a:avLst/>
@@ -2027,14 +1996,14 @@
       </p:sp>
       <p:sp>
         <p:nvSpPr>
-          <p:cNvPr id="35" name="Shape 32"/>
-          <p:cNvSpPr/>
-          <p:nvPr/>
-        </p:nvSpPr>
-        <p:spPr>
-          <a:xfrm>
-            <a:off x="9596628" y="2167860"/>
-            <a:ext cx="690372" cy="1764060"/>
+          <p:cNvPr id="34" name="Shape 31"/>
+          <p:cNvSpPr/>
+          <p:nvPr/>
+        </p:nvSpPr>
+        <p:spPr>
+          <a:xfrm>
+            <a:off x="9678924" y="2270821"/>
+            <a:ext cx="681228" cy="1880555"/>
           </a:xfrm>
           <a:prstGeom prst="rect">
             <a:avLst/>
@@ -2054,14 +2023,14 @@
       </p:sp>
       <p:sp>
         <p:nvSpPr>
-          <p:cNvPr id="36" name="Text 33"/>
-          <p:cNvSpPr/>
-          <p:nvPr/>
-        </p:nvSpPr>
-        <p:spPr>
-          <a:xfrm>
-            <a:off x="9560052" y="4059936"/>
-            <a:ext cx="763524" cy="164592"/>
+          <p:cNvPr id="35" name="Text 32"/>
+          <p:cNvSpPr/>
+          <p:nvPr/>
+        </p:nvSpPr>
+        <p:spPr>
+          <a:xfrm>
+            <a:off x="9642348" y="4279392"/>
+            <a:ext cx="754380" cy="164592"/>
           </a:xfrm>
           <a:prstGeom prst="rect">
             <a:avLst/>
@@ -2095,13 +2064,13 @@
       </p:sp>
       <p:sp>
         <p:nvSpPr>
-          <p:cNvPr id="37" name="Shape 34"/>
-          <p:cNvSpPr/>
-          <p:nvPr/>
-        </p:nvSpPr>
-        <p:spPr>
-          <a:xfrm>
-            <a:off x="6858000" y="4846320"/>
+          <p:cNvPr id="36" name="Shape 33"/>
+          <p:cNvSpPr/>
+          <p:nvPr/>
+        </p:nvSpPr>
+        <p:spPr>
+          <a:xfrm>
+            <a:off x="6903720" y="5157216"/>
             <a:ext cx="475488" cy="0"/>
           </a:xfrm>
           <a:prstGeom prst="line">
@@ -2120,14 +2089,14 @@
       </p:sp>
       <p:sp>
         <p:nvSpPr>
-          <p:cNvPr id="38" name="Text 35"/>
-          <p:cNvSpPr/>
-          <p:nvPr/>
-        </p:nvSpPr>
-        <p:spPr>
-          <a:xfrm>
-            <a:off x="7479792" y="4754880"/>
-            <a:ext cx="3474720" cy="164592"/>
+          <p:cNvPr id="37" name="Text 34"/>
+          <p:cNvSpPr/>
+          <p:nvPr/>
+        </p:nvSpPr>
+        <p:spPr>
+          <a:xfrm>
+            <a:off x="7525512" y="5065776"/>
+            <a:ext cx="3429000" cy="164592"/>
           </a:xfrm>
           <a:prstGeom prst="rect">
             <a:avLst/>
@@ -2161,7 +2130,7 @@
       </p:sp>
       <p:sp>
         <p:nvSpPr>
-          <p:cNvPr id="39" name="Text 36"/>
+          <p:cNvPr id="38" name="Text 35"/>
           <p:cNvSpPr/>
           <p:nvPr/>
         </p:nvSpPr>

--- a/effect-tests/style-candidate-editable-samples/samples/style-sample-oriental-heritage.pptx
+++ b/effect-tests/style-candidate-editable-samples/samples/style-sample-oriental-heritage.pptx
@@ -1368,23 +1368,17 @@
         </p:nvSpPr>
         <p:spPr>
           <a:xfrm>
-            <a:off x="2139696" y="4645152"/>
-            <a:ext cx="1353312" cy="621792"/>
-          </a:xfrm>
-          <a:prstGeom prst="roundRect">
-            <a:avLst>
-              <a:gd name="adj" fmla="val 11765"/>
-            </a:avLst>
-          </a:prstGeom>
-          <a:solidFill>
-            <a:srgbClr val="F3EADB">
-              <a:alpha val="76000"/>
-            </a:srgbClr>
-          </a:solidFill>
-          <a:ln w="12700">
+            <a:off x="2139696" y="4681728"/>
+            <a:ext cx="530352" cy="0"/>
+          </a:xfrm>
+          <a:prstGeom prst="line">
+            <a:avLst/>
+          </a:prstGeom>
+          <a:noFill/>
+          <a:ln w="25400">
             <a:solidFill>
               <a:srgbClr val="B91C1C">
-                <a:alpha val="64000"/>
+                <a:alpha val="78000"/>
               </a:srgbClr>
             </a:solidFill>
             <a:prstDash val="solid"/>
@@ -1399,8 +1393,8 @@
         </p:nvSpPr>
         <p:spPr>
           <a:xfrm>
-            <a:off x="2267712" y="4736592"/>
-            <a:ext cx="1097280" cy="286024"/>
+            <a:off x="2139696" y="4809744"/>
+            <a:ext cx="1225296" cy="329184"/>
           </a:xfrm>
           <a:prstGeom prst="rect">
             <a:avLst/>
@@ -1440,8 +1434,8 @@
         </p:nvSpPr>
         <p:spPr>
           <a:xfrm>
-            <a:off x="2267712" y="5005791"/>
-            <a:ext cx="1097280" cy="161666"/>
+            <a:off x="2139696" y="5175504"/>
+            <a:ext cx="1225296" cy="228600"/>
           </a:xfrm>
           <a:prstGeom prst="rect">
             <a:avLst/>
@@ -1459,7 +1453,7 @@
               <a:buNone/>
             </a:pPr>
             <a:r>
-              <a:rPr lang="en-US" sz="760" b="1" dirty="0">
+              <a:rPr lang="en-US" sz="780" b="1" dirty="0">
                 <a:solidFill>
                   <a:srgbClr val="B91C1C"/>
                 </a:solidFill>
@@ -1469,7 +1463,7 @@
               </a:rPr>
               <a:t>企业已进入试点</a:t>
             </a:r>
-            <a:endParaRPr lang="en-US" sz="760" dirty="0"/>
+            <a:endParaRPr lang="en-US" sz="780" dirty="0"/>
           </a:p>
         </p:txBody>
       </p:sp>
@@ -1481,23 +1475,17 @@
         </p:nvSpPr>
         <p:spPr>
           <a:xfrm>
-            <a:off x="3822192" y="4645152"/>
-            <a:ext cx="1353312" cy="621792"/>
-          </a:xfrm>
-          <a:prstGeom prst="roundRect">
-            <a:avLst>
-              <a:gd name="adj" fmla="val 11765"/>
-            </a:avLst>
-          </a:prstGeom>
-          <a:solidFill>
-            <a:srgbClr val="FAF8F2">
-              <a:alpha val="76000"/>
-            </a:srgbClr>
-          </a:solidFill>
-          <a:ln w="12700">
+            <a:off x="3822192" y="4681728"/>
+            <a:ext cx="530352" cy="0"/>
+          </a:xfrm>
+          <a:prstGeom prst="line">
+            <a:avLst/>
+          </a:prstGeom>
+          <a:noFill/>
+          <a:ln w="25400">
             <a:solidFill>
               <a:srgbClr val="171717">
-                <a:alpha val="64000"/>
+                <a:alpha val="78000"/>
               </a:srgbClr>
             </a:solidFill>
             <a:prstDash val="solid"/>
@@ -1512,8 +1500,8 @@
         </p:nvSpPr>
         <p:spPr>
           <a:xfrm>
-            <a:off x="3950208" y="4736592"/>
-            <a:ext cx="1097280" cy="286024"/>
+            <a:off x="3822192" y="4809744"/>
+            <a:ext cx="1225296" cy="329184"/>
           </a:xfrm>
           <a:prstGeom prst="rect">
             <a:avLst/>
@@ -1553,8 +1541,8 @@
         </p:nvSpPr>
         <p:spPr>
           <a:xfrm>
-            <a:off x="3950208" y="5005791"/>
-            <a:ext cx="1097280" cy="161666"/>
+            <a:off x="3822192" y="5175504"/>
+            <a:ext cx="1225296" cy="228600"/>
           </a:xfrm>
           <a:prstGeom prst="rect">
             <a:avLst/>
@@ -1572,7 +1560,7 @@
               <a:buNone/>
             </a:pPr>
             <a:r>
-              <a:rPr lang="en-US" sz="760" b="1" dirty="0">
+              <a:rPr lang="en-US" sz="780" b="1" dirty="0">
                 <a:solidFill>
                   <a:srgbClr val="B91C1C"/>
                 </a:solidFill>
@@ -1582,7 +1570,7 @@
               </a:rPr>
               <a:t>高频任务提效</a:t>
             </a:r>
-            <a:endParaRPr lang="en-US" sz="760" dirty="0"/>
+            <a:endParaRPr lang="en-US" sz="780" dirty="0"/>
           </a:p>
         </p:txBody>
       </p:sp>
@@ -1594,23 +1582,17 @@
         </p:nvSpPr>
         <p:spPr>
           <a:xfrm>
-            <a:off x="5504688" y="4645152"/>
-            <a:ext cx="1353312" cy="621792"/>
-          </a:xfrm>
-          <a:prstGeom prst="roundRect">
-            <a:avLst>
-              <a:gd name="adj" fmla="val 11765"/>
-            </a:avLst>
-          </a:prstGeom>
-          <a:solidFill>
-            <a:srgbClr val="F3EADB">
-              <a:alpha val="76000"/>
-            </a:srgbClr>
-          </a:solidFill>
-          <a:ln w="12700">
+            <a:off x="5504688" y="4681728"/>
+            <a:ext cx="530352" cy="0"/>
+          </a:xfrm>
+          <a:prstGeom prst="line">
+            <a:avLst/>
+          </a:prstGeom>
+          <a:noFill/>
+          <a:ln w="25400">
             <a:solidFill>
               <a:srgbClr val="B91C1C">
-                <a:alpha val="64000"/>
+                <a:alpha val="78000"/>
               </a:srgbClr>
             </a:solidFill>
             <a:prstDash val="solid"/>
@@ -1625,8 +1607,8 @@
         </p:nvSpPr>
         <p:spPr>
           <a:xfrm>
-            <a:off x="5632704" y="4736592"/>
-            <a:ext cx="1097280" cy="286024"/>
+            <a:off x="5504688" y="4809744"/>
+            <a:ext cx="1225296" cy="329184"/>
           </a:xfrm>
           <a:prstGeom prst="rect">
             <a:avLst/>
@@ -1666,8 +1648,8 @@
         </p:nvSpPr>
         <p:spPr>
           <a:xfrm>
-            <a:off x="5632704" y="5005791"/>
-            <a:ext cx="1097280" cy="161666"/>
+            <a:off x="5504688" y="5175504"/>
+            <a:ext cx="1225296" cy="228600"/>
           </a:xfrm>
           <a:prstGeom prst="rect">
             <a:avLst/>
@@ -1685,7 +1667,7 @@
               <a:buNone/>
             </a:pPr>
             <a:r>
-              <a:rPr lang="en-US" sz="760" b="1" dirty="0">
+              <a:rPr lang="en-US" sz="780" b="1" dirty="0">
                 <a:solidFill>
                   <a:srgbClr val="B91C1C"/>
                 </a:solidFill>
@@ -1695,7 +1677,7 @@
               </a:rPr>
               <a:t>规模化落地窗口</a:t>
             </a:r>
-            <a:endParaRPr lang="en-US" sz="760" dirty="0"/>
+            <a:endParaRPr lang="en-US" sz="780" dirty="0"/>
           </a:p>
         </p:txBody>
       </p:sp>
